--- a/~sasano/lecture/pn2/26/P1213.pptx
+++ b/~sasano/lecture/pn2/26/P1213.pptx
@@ -321,7 +321,7 @@
             <a:fld id="{E90ED720-0104-4369-84BC-D37694168613}" type="datetimeFigureOut">
               <a:rPr kumimoji="1" lang="ja-JP" altLang="en-US" smtClean="0"/>
               <a:pPr/>
-              <a:t>2025/12/23</a:t>
+              <a:t>2026/9/28</a:t>
             </a:fld>
             <a:endParaRPr kumimoji="1" lang="ja-JP" altLang="en-US"/>
           </a:p>
@@ -518,7 +518,7 @@
             <a:fld id="{E90ED720-0104-4369-84BC-D37694168613}" type="datetimeFigureOut">
               <a:rPr kumimoji="1" lang="ja-JP" altLang="en-US" smtClean="0"/>
               <a:pPr/>
-              <a:t>2025/12/23</a:t>
+              <a:t>2026/9/28</a:t>
             </a:fld>
             <a:endParaRPr kumimoji="1" lang="ja-JP" altLang="en-US"/>
           </a:p>
@@ -725,7 +725,7 @@
             <a:fld id="{E90ED720-0104-4369-84BC-D37694168613}" type="datetimeFigureOut">
               <a:rPr kumimoji="1" lang="ja-JP" altLang="en-US" smtClean="0"/>
               <a:pPr/>
-              <a:t>2025/12/23</a:t>
+              <a:t>2026/9/28</a:t>
             </a:fld>
             <a:endParaRPr kumimoji="1" lang="ja-JP" altLang="en-US"/>
           </a:p>
@@ -922,7 +922,7 @@
             <a:fld id="{E90ED720-0104-4369-84BC-D37694168613}" type="datetimeFigureOut">
               <a:rPr kumimoji="1" lang="ja-JP" altLang="en-US" smtClean="0"/>
               <a:pPr/>
-              <a:t>2025/12/23</a:t>
+              <a:t>2026/9/28</a:t>
             </a:fld>
             <a:endParaRPr kumimoji="1" lang="ja-JP" altLang="en-US"/>
           </a:p>
@@ -1164,7 +1164,7 @@
             <a:fld id="{E90ED720-0104-4369-84BC-D37694168613}" type="datetimeFigureOut">
               <a:rPr kumimoji="1" lang="ja-JP" altLang="en-US" smtClean="0"/>
               <a:pPr/>
-              <a:t>2025/12/23</a:t>
+              <a:t>2026/9/28</a:t>
             </a:fld>
             <a:endParaRPr kumimoji="1" lang="ja-JP" altLang="en-US"/>
           </a:p>
@@ -1510,7 +1510,7 @@
             <a:fld id="{E90ED720-0104-4369-84BC-D37694168613}" type="datetimeFigureOut">
               <a:rPr kumimoji="1" lang="ja-JP" altLang="en-US" smtClean="0"/>
               <a:pPr/>
-              <a:t>2025/12/23</a:t>
+              <a:t>2026/9/28</a:t>
             </a:fld>
             <a:endParaRPr kumimoji="1" lang="ja-JP" altLang="en-US"/>
           </a:p>
@@ -1990,7 +1990,7 @@
             <a:fld id="{E90ED720-0104-4369-84BC-D37694168613}" type="datetimeFigureOut">
               <a:rPr kumimoji="1" lang="ja-JP" altLang="en-US" smtClean="0"/>
               <a:pPr/>
-              <a:t>2025/12/23</a:t>
+              <a:t>2026/9/28</a:t>
             </a:fld>
             <a:endParaRPr kumimoji="1" lang="ja-JP" altLang="en-US"/>
           </a:p>
@@ -2104,7 +2104,7 @@
             <a:fld id="{E90ED720-0104-4369-84BC-D37694168613}" type="datetimeFigureOut">
               <a:rPr kumimoji="1" lang="ja-JP" altLang="en-US" smtClean="0"/>
               <a:pPr/>
-              <a:t>2025/12/23</a:t>
+              <a:t>2026/9/28</a:t>
             </a:fld>
             <a:endParaRPr kumimoji="1" lang="ja-JP" altLang="en-US"/>
           </a:p>
@@ -2196,7 +2196,7 @@
             <a:fld id="{E90ED720-0104-4369-84BC-D37694168613}" type="datetimeFigureOut">
               <a:rPr kumimoji="1" lang="ja-JP" altLang="en-US" smtClean="0"/>
               <a:pPr/>
-              <a:t>2025/12/23</a:t>
+              <a:t>2026/9/28</a:t>
             </a:fld>
             <a:endParaRPr kumimoji="1" lang="ja-JP" altLang="en-US"/>
           </a:p>
@@ -2500,7 +2500,7 @@
             <a:fld id="{E90ED720-0104-4369-84BC-D37694168613}" type="datetimeFigureOut">
               <a:rPr kumimoji="1" lang="ja-JP" altLang="en-US" smtClean="0"/>
               <a:pPr/>
-              <a:t>2025/12/23</a:t>
+              <a:t>2026/9/28</a:t>
             </a:fld>
             <a:endParaRPr kumimoji="1" lang="ja-JP" altLang="en-US"/>
           </a:p>
@@ -2749,7 +2749,7 @@
             <a:fld id="{E90ED720-0104-4369-84BC-D37694168613}" type="datetimeFigureOut">
               <a:rPr kumimoji="1" lang="ja-JP" altLang="en-US" smtClean="0"/>
               <a:pPr/>
-              <a:t>2025/12/23</a:t>
+              <a:t>2026/9/28</a:t>
             </a:fld>
             <a:endParaRPr kumimoji="1" lang="ja-JP" altLang="en-US"/>
           </a:p>
@@ -2989,7 +2989,7 @@
             <a:fld id="{E90ED720-0104-4369-84BC-D37694168613}" type="datetimeFigureOut">
               <a:rPr kumimoji="1" lang="ja-JP" altLang="en-US" smtClean="0"/>
               <a:pPr/>
-              <a:t>2025/12/23</a:t>
+              <a:t>2026/9/28</a:t>
             </a:fld>
             <a:endParaRPr kumimoji="1" lang="ja-JP" altLang="en-US"/>
           </a:p>
@@ -3391,8 +3391,8 @@
         </p:nvSpPr>
         <p:spPr>
           <a:xfrm>
-            <a:off x="2786050" y="5072074"/>
-            <a:ext cx="3534942" cy="523220"/>
+            <a:off x="3821634" y="5122671"/>
+            <a:ext cx="1500732" cy="523220"/>
           </a:xfrm>
           <a:prstGeom prst="rect">
             <a:avLst/>
@@ -3405,9 +3405,14 @@
           </a:bodyPr>
           <a:lstStyle/>
           <a:p>
+            <a:pPr algn="ctr"/>
+            <a:r>
+              <a:rPr lang="ja-JP" altLang="en-US" sz="2800"/>
+              <a:t>篠埜　</a:t>
+            </a:r>
             <a:r>
               <a:rPr lang="ja-JP" altLang="en-US" sz="2800" dirty="0"/>
-              <a:t>情報工学科　篠埜　功</a:t>
+              <a:t>功</a:t>
             </a:r>
             <a:endParaRPr kumimoji="1" lang="ja-JP" altLang="en-US" sz="2800" dirty="0"/>
           </a:p>
